--- a/deck/bookly-pitch-deck.pptx
+++ b/deck/bookly-pitch-deck.pptx
@@ -4097,7 +4097,7 @@
                 </a:solidFill>
                 <a:latin typeface="Helvetica Neue"/>
               </a:rPr>
-              <a:t>Claude decides:</a:t>
+              <a:t>The model decides:</a:t>
             </a:r>
           </a:p>
           <a:p>
@@ -5840,7 +5840,7 @@
                 </a:solidFill>
                 <a:latin typeface="Helvetica Neue"/>
               </a:rPr>
-              <a:t>A moderation-endpoint-style check — a separate, cheap Claude call — screens every inbound and outbound message against configurable categories.</a:t>
+              <a:t>A moderation-endpoint-style check — a separate, cheap OpenAI call — screens every inbound and outbound message against configurable categories.</a:t>
             </a:r>
           </a:p>
         </p:txBody>

--- a/deck/bookly-pitch-deck.pptx
+++ b/deck/bookly-pitch-deck.pptx
@@ -3895,7 +3895,7 @@
                 </a:solidFill>
                 <a:latin typeface="Helvetica Neue"/>
               </a:rPr>
-              <a:t>Single-page chat UI</a:t>
+              <a:t>Chat UI + identity gate</a:t>
             </a:r>
           </a:p>
           <a:p>
@@ -3911,7 +3911,7 @@
                 </a:solidFill>
                 <a:latin typeface="Helvetica Neue"/>
               </a:rPr>
-              <a:t>(HTML/CSS/JS)</a:t>
+              <a:t>(name/email, HTML/CSS/JS)</a:t>
             </a:r>
           </a:p>
         </p:txBody>
@@ -5017,7 +5017,7 @@
                 </a:solidFill>
                 <a:latin typeface="Helvetica Neue"/>
               </a:rPr>
-              <a:t>Per-session conversation history, in-memory in the backend process. Nothing is persisted across restarts — a prototype-scoped choice, called out for production in slide 4.</a:t>
+              <a:t>Per-session history, in-memory in the backend, plus the identity gate's name/email — folded into the system prompt per call, never persisted. Nothing survives a restart (slide 4).</a:t>
             </a:r>
           </a:p>
         </p:txBody>
@@ -6878,7 +6878,7 @@
                 </a:solidFill>
                 <a:latin typeface="Helvetica Neue"/>
               </a:rPr>
-              <a:t>Today, “what's your email” is the only check before disclosing order details. Production needs real auth before that trust boundary is crossed.</a:t>
+              <a:t>Today the identity gate collects a self-reported name/email up front — format-checked, not verified. Production needs real auth before that trust boundary is crossed.</a:t>
             </a:r>
           </a:p>
         </p:txBody>
